--- a/new-app/docs/Application-Flowchart.pptx
+++ b/new-app/docs/Application-Flowchart.pptx
@@ -3967,7 +3967,7 @@
                 </a:solidFill>
                 <a:latin typeface="Calibri"/>
               </a:rPr>
-              <a:t>List every file. A multi-page cover splits into named pages. A BRF report is left out.</a:t>
+              <a:t>List every file. A multi-page cover splits into named pages. A 401(k) BRF report is left out. A 403(b) report stays.</a:t>
             </a:r>
           </a:p>
         </p:txBody>
@@ -4623,7 +4623,7 @@
                 </a:solidFill>
                 <a:latin typeface="Calibri"/>
               </a:rPr>
-              <a:t>Choose retype, then Process</a:t>
+              <a:t>Choose the HCE rewrite, then Process</a:t>
             </a:r>
           </a:p>
         </p:txBody>
@@ -4658,7 +4658,7 @@
                 </a:solidFill>
                 <a:latin typeface="Calibri"/>
               </a:rPr>
-              <a:t>Page 2 of 5   ·   Dates stay as printed unless you check the box</a:t>
+              <a:t>Page 2 of 5   ·   Cover date and 402(g) dates change every Process</a:t>
             </a:r>
           </a:p>
         </p:txBody>
@@ -5116,7 +5116,7 @@
                 </a:solidFill>
                 <a:latin typeface="Calibri"/>
               </a:rPr>
-              <a:t>Retype on?</a:t>
+              <a:t>HCE % on?</a:t>
             </a:r>
           </a:p>
         </p:txBody>
@@ -5190,7 +5190,7 @@
                 </a:solidFill>
                 <a:latin typeface="Calibri"/>
               </a:rPr>
-              <a:t>Set the cover date to today. Rewrite the HCE % and off-calendar 402(g) dates where that text is found.</a:t>
+              <a:t>Rewrite the prior-year HCE %. Cover date and off-calendar 402(g) dates are set too.</a:t>
             </a:r>
           </a:p>
         </p:txBody>
@@ -5264,7 +5264,7 @@
                 </a:solidFill>
                 <a:latin typeface="Calibri"/>
               </a:rPr>
-              <a:t>Leave dates and percentages as printed. This is the default. A cover date that is not today is still flagged.</a:t>
+              <a:t>Leave the HCE % as printed. This is the default. Cover date and off-calendar 402(g) dates are still set.</a:t>
             </a:r>
           </a:p>
         </p:txBody>
@@ -6541,7 +6541,7 @@
                 </a:solidFill>
                 <a:latin typeface="Calibri"/>
               </a:rPr>
-              <a:t>Keep or remove each paragraph: compliance failure, PRIOR or CURRENT, after 12 months, top heavy at 60%, variance, and no action.</a:t>
+              <a:t>Keep or remove each paragraph: compliance failure, PRIOR or CURRENT, after 12 months, top heavy above 60%, variance, and no action.</a:t>
             </a:r>
           </a:p>
         </p:txBody>
@@ -6985,7 +6985,7 @@
                 </a:solidFill>
                 <a:latin typeface="Calibri"/>
               </a:rPr>
-              <a:t>Add a bookmark for each section that remains, including ADP Test, ACP Test, and HCE on a 403(b). Do not bookmark BRF or variance.</a:t>
+              <a:t>Add a bookmark for each remaining section. A 401(k) does not bookmark BRF. A 403(b) uses HCE and keeps BRF. Variance is not bookmarked.</a:t>
             </a:r>
           </a:p>
         </p:txBody>
@@ -7059,7 +7059,7 @@
                 </a:solidFill>
                 <a:latin typeface="Calibri"/>
               </a:rPr>
-              <a:t>Audited wording, Statement of Contribution, 5500 wording, and escalation wording.</a:t>
+              <a:t>Audited wording, 5500 wording, and escalation wording. A 457 package may keep the Statement of Contribution.</a:t>
             </a:r>
           </a:p>
         </p:txBody>
@@ -8003,7 +8003,7 @@
                 </a:solidFill>
                 <a:latin typeface="Calibri"/>
               </a:rPr>
-              <a:t>Flag the cover letter when the date is not today. It changes only if Retype was checked on page 2.</a:t>
+              <a:t>Every Process sets the cover letter date to today. Off-calendar 402(g) dates are rewritten too.</a:t>
             </a:r>
           </a:p>
         </p:txBody>
@@ -8760,7 +8760,7 @@
                 </a:solidFill>
                 <a:latin typeface="Calibri"/>
               </a:rPr>
-              <a:t>Save PlanNumber_BeginningYear-Valuation.pdf and an Outlook draft.</a:t>
+              <a:t>Save the named PDF and an Outlook draft, unless Assembly stops blocks a failed check.</a:t>
             </a:r>
           </a:p>
         </p:txBody>
